--- a/public/videos/repositories/open-close-radar/open-close-radar-tech-preview.pptx
+++ b/public/videos/repositories/open-close-radar/open-close-radar-tech-preview.pptx
@@ -134,7 +134,7 @@
           <p:cNvPr id="2" name="タイトル 1">
             <a:extLst>
               <a:ext uri="{FF2B5EF4-FFF2-40B4-BE49-F238E27FC236}">
-                <a16:creationId xmlns:a16="http://schemas.microsoft.com/office/drawing/2014/main" id="{DD237DE0-7FF8-7D3E-023F-A326AA255FA9}"/>
+                <a16:creationId xmlns:a16="http://schemas.microsoft.com/office/drawing/2014/main" id="{A0B1BA3C-83DF-A3CD-B0FC-83B8098C991F}"/>
               </a:ext>
             </a:extLst>
           </p:cNvPr>
@@ -171,7 +171,7 @@
           <p:cNvPr id="3" name="字幕 2">
             <a:extLst>
               <a:ext uri="{FF2B5EF4-FFF2-40B4-BE49-F238E27FC236}">
-                <a16:creationId xmlns:a16="http://schemas.microsoft.com/office/drawing/2014/main" id="{28CC8375-EC47-EA1A-A004-FF95B09538AC}"/>
+                <a16:creationId xmlns:a16="http://schemas.microsoft.com/office/drawing/2014/main" id="{BF0D2746-A719-5652-538B-0D7D4E537653}"/>
               </a:ext>
             </a:extLst>
           </p:cNvPr>
@@ -241,7 +241,7 @@
           <p:cNvPr id="4" name="日付プレースホルダー 3">
             <a:extLst>
               <a:ext uri="{FF2B5EF4-FFF2-40B4-BE49-F238E27FC236}">
-                <a16:creationId xmlns:a16="http://schemas.microsoft.com/office/drawing/2014/main" id="{F88C0611-C746-4DAA-69A6-C46CF8898D68}"/>
+                <a16:creationId xmlns:a16="http://schemas.microsoft.com/office/drawing/2014/main" id="{90BF8386-51E8-7EF3-71C7-8A57CB0AD9E1}"/>
               </a:ext>
             </a:extLst>
           </p:cNvPr>
@@ -257,7 +257,7 @@
           <a:bodyPr/>
           <a:lstStyle/>
           <a:p>
-            <a:fld id="{B3066D93-A836-4D7D-B07F-234CAEC6A374}" type="datetimeFigureOut">
+            <a:fld id="{B175E55D-0B30-486F-B5EB-DBBEBFBA1ED5}" type="datetimeFigureOut">
               <a:rPr kumimoji="1" lang="ja-JP" altLang="en-US" smtClean="0"/>
               <a:t>2026/7/30</a:t>
             </a:fld>
@@ -270,7 +270,7 @@
           <p:cNvPr id="5" name="フッター プレースホルダー 4">
             <a:extLst>
               <a:ext uri="{FF2B5EF4-FFF2-40B4-BE49-F238E27FC236}">
-                <a16:creationId xmlns:a16="http://schemas.microsoft.com/office/drawing/2014/main" id="{E6E7E013-5C80-95B6-3EB9-D836504B7E6E}"/>
+                <a16:creationId xmlns:a16="http://schemas.microsoft.com/office/drawing/2014/main" id="{2D72D80B-B5A4-09C1-B04E-CCE47C97BE73}"/>
               </a:ext>
             </a:extLst>
           </p:cNvPr>
@@ -295,7 +295,7 @@
           <p:cNvPr id="6" name="スライド番号プレースホルダー 5">
             <a:extLst>
               <a:ext uri="{FF2B5EF4-FFF2-40B4-BE49-F238E27FC236}">
-                <a16:creationId xmlns:a16="http://schemas.microsoft.com/office/drawing/2014/main" id="{5327B16B-FD35-CE3D-F3BD-C7345B3862DE}"/>
+                <a16:creationId xmlns:a16="http://schemas.microsoft.com/office/drawing/2014/main" id="{7AE03D6B-FB69-2F21-C2FF-09830D14A061}"/>
               </a:ext>
             </a:extLst>
           </p:cNvPr>
@@ -311,7 +311,7 @@
           <a:bodyPr/>
           <a:lstStyle/>
           <a:p>
-            <a:fld id="{3AB76FAA-6FD1-41DC-A69E-9EC5B86EB5C2}" type="slidenum">
+            <a:fld id="{11E179F6-E3FD-41F4-B931-2F061DA007D0}" type="slidenum">
               <a:rPr kumimoji="1" lang="ja-JP" altLang="en-US" smtClean="0"/>
               <a:t>‹#›</a:t>
             </a:fld>
@@ -322,7 +322,7 @@
     </p:spTree>
     <p:extLst>
       <p:ext uri="{BB962C8B-B14F-4D97-AF65-F5344CB8AC3E}">
-        <p14:creationId xmlns:p14="http://schemas.microsoft.com/office/powerpoint/2010/main" val="2110746888"/>
+        <p14:creationId xmlns:p14="http://schemas.microsoft.com/office/powerpoint/2010/main" val="2395280285"/>
       </p:ext>
     </p:extLst>
   </p:cSld>
@@ -354,7 +354,7 @@
           <p:cNvPr id="2" name="タイトル 1">
             <a:extLst>
               <a:ext uri="{FF2B5EF4-FFF2-40B4-BE49-F238E27FC236}">
-                <a16:creationId xmlns:a16="http://schemas.microsoft.com/office/drawing/2014/main" id="{00735E6A-651E-2900-4B11-CF26959CFCAF}"/>
+                <a16:creationId xmlns:a16="http://schemas.microsoft.com/office/drawing/2014/main" id="{8705E9D3-FE0D-F510-4615-7EDEFD4C29F6}"/>
               </a:ext>
             </a:extLst>
           </p:cNvPr>
@@ -382,7 +382,7 @@
           <p:cNvPr id="3" name="縦書きテキスト プレースホルダー 2">
             <a:extLst>
               <a:ext uri="{FF2B5EF4-FFF2-40B4-BE49-F238E27FC236}">
-                <a16:creationId xmlns:a16="http://schemas.microsoft.com/office/drawing/2014/main" id="{23F2C96F-3C01-AB0C-5011-58E3CB1CBFC1}"/>
+                <a16:creationId xmlns:a16="http://schemas.microsoft.com/office/drawing/2014/main" id="{FE16AC58-FE36-D42A-A1B5-82940C05B934}"/>
               </a:ext>
             </a:extLst>
           </p:cNvPr>
@@ -471,7 +471,7 @@
           <p:cNvPr id="4" name="日付プレースホルダー 3">
             <a:extLst>
               <a:ext uri="{FF2B5EF4-FFF2-40B4-BE49-F238E27FC236}">
-                <a16:creationId xmlns:a16="http://schemas.microsoft.com/office/drawing/2014/main" id="{C52E19D3-DB93-09F1-7242-ACAF2725BFB5}"/>
+                <a16:creationId xmlns:a16="http://schemas.microsoft.com/office/drawing/2014/main" id="{C31EABE4-5B3D-2C10-BB54-0CD80000114A}"/>
               </a:ext>
             </a:extLst>
           </p:cNvPr>
@@ -487,7 +487,7 @@
           <a:bodyPr/>
           <a:lstStyle/>
           <a:p>
-            <a:fld id="{B3066D93-A836-4D7D-B07F-234CAEC6A374}" type="datetimeFigureOut">
+            <a:fld id="{B175E55D-0B30-486F-B5EB-DBBEBFBA1ED5}" type="datetimeFigureOut">
               <a:rPr kumimoji="1" lang="ja-JP" altLang="en-US" smtClean="0"/>
               <a:t>2026/7/30</a:t>
             </a:fld>
@@ -500,7 +500,7 @@
           <p:cNvPr id="5" name="フッター プレースホルダー 4">
             <a:extLst>
               <a:ext uri="{FF2B5EF4-FFF2-40B4-BE49-F238E27FC236}">
-                <a16:creationId xmlns:a16="http://schemas.microsoft.com/office/drawing/2014/main" id="{309FF140-262B-6E32-12F1-9B5AE616B393}"/>
+                <a16:creationId xmlns:a16="http://schemas.microsoft.com/office/drawing/2014/main" id="{0B6EC386-7E20-144F-30E0-F99542E9DAD0}"/>
               </a:ext>
             </a:extLst>
           </p:cNvPr>
@@ -525,7 +525,7 @@
           <p:cNvPr id="6" name="スライド番号プレースホルダー 5">
             <a:extLst>
               <a:ext uri="{FF2B5EF4-FFF2-40B4-BE49-F238E27FC236}">
-                <a16:creationId xmlns:a16="http://schemas.microsoft.com/office/drawing/2014/main" id="{F1EB1063-33C0-8873-F9FB-3C8A34AAEFA9}"/>
+                <a16:creationId xmlns:a16="http://schemas.microsoft.com/office/drawing/2014/main" id="{E6DF2CA2-A533-38CC-76B1-67FD34AD616C}"/>
               </a:ext>
             </a:extLst>
           </p:cNvPr>
@@ -541,7 +541,7 @@
           <a:bodyPr/>
           <a:lstStyle/>
           <a:p>
-            <a:fld id="{3AB76FAA-6FD1-41DC-A69E-9EC5B86EB5C2}" type="slidenum">
+            <a:fld id="{11E179F6-E3FD-41F4-B931-2F061DA007D0}" type="slidenum">
               <a:rPr kumimoji="1" lang="ja-JP" altLang="en-US" smtClean="0"/>
               <a:t>‹#›</a:t>
             </a:fld>
@@ -552,7 +552,7 @@
     </p:spTree>
     <p:extLst>
       <p:ext uri="{BB962C8B-B14F-4D97-AF65-F5344CB8AC3E}">
-        <p14:creationId xmlns:p14="http://schemas.microsoft.com/office/powerpoint/2010/main" val="2983664482"/>
+        <p14:creationId xmlns:p14="http://schemas.microsoft.com/office/powerpoint/2010/main" val="484252357"/>
       </p:ext>
     </p:extLst>
   </p:cSld>
@@ -584,7 +584,7 @@
           <p:cNvPr id="2" name="縦書きタイトル 1">
             <a:extLst>
               <a:ext uri="{FF2B5EF4-FFF2-40B4-BE49-F238E27FC236}">
-                <a16:creationId xmlns:a16="http://schemas.microsoft.com/office/drawing/2014/main" id="{822E9BD9-1892-8C91-0E55-4EB090EF9D41}"/>
+                <a16:creationId xmlns:a16="http://schemas.microsoft.com/office/drawing/2014/main" id="{9FBD3E55-FEB4-3CE3-00DC-7E79805B07FD}"/>
               </a:ext>
             </a:extLst>
           </p:cNvPr>
@@ -617,7 +617,7 @@
           <p:cNvPr id="3" name="縦書きテキスト プレースホルダー 2">
             <a:extLst>
               <a:ext uri="{FF2B5EF4-FFF2-40B4-BE49-F238E27FC236}">
-                <a16:creationId xmlns:a16="http://schemas.microsoft.com/office/drawing/2014/main" id="{8D118B59-9D95-DEA8-1940-1981CB8A9924}"/>
+                <a16:creationId xmlns:a16="http://schemas.microsoft.com/office/drawing/2014/main" id="{5A93C9B6-E403-51C8-3272-0F31DE0D6E4A}"/>
               </a:ext>
             </a:extLst>
           </p:cNvPr>
@@ -711,7 +711,7 @@
           <p:cNvPr id="4" name="日付プレースホルダー 3">
             <a:extLst>
               <a:ext uri="{FF2B5EF4-FFF2-40B4-BE49-F238E27FC236}">
-                <a16:creationId xmlns:a16="http://schemas.microsoft.com/office/drawing/2014/main" id="{527507FD-A7B3-483D-9D71-14B781420151}"/>
+                <a16:creationId xmlns:a16="http://schemas.microsoft.com/office/drawing/2014/main" id="{EDA868CD-80E6-1C14-6470-904C07E145A1}"/>
               </a:ext>
             </a:extLst>
           </p:cNvPr>
@@ -727,7 +727,7 @@
           <a:bodyPr/>
           <a:lstStyle/>
           <a:p>
-            <a:fld id="{B3066D93-A836-4D7D-B07F-234CAEC6A374}" type="datetimeFigureOut">
+            <a:fld id="{B175E55D-0B30-486F-B5EB-DBBEBFBA1ED5}" type="datetimeFigureOut">
               <a:rPr kumimoji="1" lang="ja-JP" altLang="en-US" smtClean="0"/>
               <a:t>2026/7/30</a:t>
             </a:fld>
@@ -740,7 +740,7 @@
           <p:cNvPr id="5" name="フッター プレースホルダー 4">
             <a:extLst>
               <a:ext uri="{FF2B5EF4-FFF2-40B4-BE49-F238E27FC236}">
-                <a16:creationId xmlns:a16="http://schemas.microsoft.com/office/drawing/2014/main" id="{50FA04F2-F687-2569-106C-F6467CC6C248}"/>
+                <a16:creationId xmlns:a16="http://schemas.microsoft.com/office/drawing/2014/main" id="{5EE3D33D-637B-E21A-C1A6-D258BD827272}"/>
               </a:ext>
             </a:extLst>
           </p:cNvPr>
@@ -765,7 +765,7 @@
           <p:cNvPr id="6" name="スライド番号プレースホルダー 5">
             <a:extLst>
               <a:ext uri="{FF2B5EF4-FFF2-40B4-BE49-F238E27FC236}">
-                <a16:creationId xmlns:a16="http://schemas.microsoft.com/office/drawing/2014/main" id="{DF14BD29-74EC-8ACB-6C31-64B16D66C9BF}"/>
+                <a16:creationId xmlns:a16="http://schemas.microsoft.com/office/drawing/2014/main" id="{1456E7C9-6F27-A692-8921-4BB96155BCFF}"/>
               </a:ext>
             </a:extLst>
           </p:cNvPr>
@@ -781,7 +781,7 @@
           <a:bodyPr/>
           <a:lstStyle/>
           <a:p>
-            <a:fld id="{3AB76FAA-6FD1-41DC-A69E-9EC5B86EB5C2}" type="slidenum">
+            <a:fld id="{11E179F6-E3FD-41F4-B931-2F061DA007D0}" type="slidenum">
               <a:rPr kumimoji="1" lang="ja-JP" altLang="en-US" smtClean="0"/>
               <a:t>‹#›</a:t>
             </a:fld>
@@ -792,7 +792,7 @@
     </p:spTree>
     <p:extLst>
       <p:ext uri="{BB962C8B-B14F-4D97-AF65-F5344CB8AC3E}">
-        <p14:creationId xmlns:p14="http://schemas.microsoft.com/office/powerpoint/2010/main" val="3645795633"/>
+        <p14:creationId xmlns:p14="http://schemas.microsoft.com/office/powerpoint/2010/main" val="1437935110"/>
       </p:ext>
     </p:extLst>
   </p:cSld>
@@ -824,7 +824,7 @@
           <p:cNvPr id="2" name="タイトル 1">
             <a:extLst>
               <a:ext uri="{FF2B5EF4-FFF2-40B4-BE49-F238E27FC236}">
-                <a16:creationId xmlns:a16="http://schemas.microsoft.com/office/drawing/2014/main" id="{A389FCB8-BDAA-5869-3F67-12EC25AEA1EC}"/>
+                <a16:creationId xmlns:a16="http://schemas.microsoft.com/office/drawing/2014/main" id="{1C50077E-00B8-2C80-E868-4A8CC484E9ED}"/>
               </a:ext>
             </a:extLst>
           </p:cNvPr>
@@ -852,7 +852,7 @@
           <p:cNvPr id="3" name="コンテンツ プレースホルダー 2">
             <a:extLst>
               <a:ext uri="{FF2B5EF4-FFF2-40B4-BE49-F238E27FC236}">
-                <a16:creationId xmlns:a16="http://schemas.microsoft.com/office/drawing/2014/main" id="{1DDEC53D-783C-10BA-BAF7-F775FAD47666}"/>
+                <a16:creationId xmlns:a16="http://schemas.microsoft.com/office/drawing/2014/main" id="{42D9D648-90B0-F92B-01AB-B7CCF281067D}"/>
               </a:ext>
             </a:extLst>
           </p:cNvPr>
@@ -941,7 +941,7 @@
           <p:cNvPr id="4" name="日付プレースホルダー 3">
             <a:extLst>
               <a:ext uri="{FF2B5EF4-FFF2-40B4-BE49-F238E27FC236}">
-                <a16:creationId xmlns:a16="http://schemas.microsoft.com/office/drawing/2014/main" id="{D0BD69AF-9F15-DFD3-0E05-B4FEE93A3820}"/>
+                <a16:creationId xmlns:a16="http://schemas.microsoft.com/office/drawing/2014/main" id="{C316C59D-04FF-68BF-5597-3FD4D433C2E4}"/>
               </a:ext>
             </a:extLst>
           </p:cNvPr>
@@ -957,7 +957,7 @@
           <a:bodyPr/>
           <a:lstStyle/>
           <a:p>
-            <a:fld id="{B3066D93-A836-4D7D-B07F-234CAEC6A374}" type="datetimeFigureOut">
+            <a:fld id="{B175E55D-0B30-486F-B5EB-DBBEBFBA1ED5}" type="datetimeFigureOut">
               <a:rPr kumimoji="1" lang="ja-JP" altLang="en-US" smtClean="0"/>
               <a:t>2026/7/30</a:t>
             </a:fld>
@@ -970,7 +970,7 @@
           <p:cNvPr id="5" name="フッター プレースホルダー 4">
             <a:extLst>
               <a:ext uri="{FF2B5EF4-FFF2-40B4-BE49-F238E27FC236}">
-                <a16:creationId xmlns:a16="http://schemas.microsoft.com/office/drawing/2014/main" id="{8E12324B-7AB2-B0DC-6039-6ABD887D526B}"/>
+                <a16:creationId xmlns:a16="http://schemas.microsoft.com/office/drawing/2014/main" id="{D7210553-2675-9855-96CB-4CA7DC18D84B}"/>
               </a:ext>
             </a:extLst>
           </p:cNvPr>
@@ -995,7 +995,7 @@
           <p:cNvPr id="6" name="スライド番号プレースホルダー 5">
             <a:extLst>
               <a:ext uri="{FF2B5EF4-FFF2-40B4-BE49-F238E27FC236}">
-                <a16:creationId xmlns:a16="http://schemas.microsoft.com/office/drawing/2014/main" id="{679257EC-E440-CEDF-29B9-0BA9A93DC1C9}"/>
+                <a16:creationId xmlns:a16="http://schemas.microsoft.com/office/drawing/2014/main" id="{C83CF5FB-5B86-DD08-8CA6-D7C3A39C6744}"/>
               </a:ext>
             </a:extLst>
           </p:cNvPr>
@@ -1011,7 +1011,7 @@
           <a:bodyPr/>
           <a:lstStyle/>
           <a:p>
-            <a:fld id="{3AB76FAA-6FD1-41DC-A69E-9EC5B86EB5C2}" type="slidenum">
+            <a:fld id="{11E179F6-E3FD-41F4-B931-2F061DA007D0}" type="slidenum">
               <a:rPr kumimoji="1" lang="ja-JP" altLang="en-US" smtClean="0"/>
               <a:t>‹#›</a:t>
             </a:fld>
@@ -1022,7 +1022,7 @@
     </p:spTree>
     <p:extLst>
       <p:ext uri="{BB962C8B-B14F-4D97-AF65-F5344CB8AC3E}">
-        <p14:creationId xmlns:p14="http://schemas.microsoft.com/office/powerpoint/2010/main" val="3172057202"/>
+        <p14:creationId xmlns:p14="http://schemas.microsoft.com/office/powerpoint/2010/main" val="1481989817"/>
       </p:ext>
     </p:extLst>
   </p:cSld>
@@ -1054,7 +1054,7 @@
           <p:cNvPr id="2" name="タイトル 1">
             <a:extLst>
               <a:ext uri="{FF2B5EF4-FFF2-40B4-BE49-F238E27FC236}">
-                <a16:creationId xmlns:a16="http://schemas.microsoft.com/office/drawing/2014/main" id="{6701D911-63CE-9A3C-FA65-E8E56C01B87B}"/>
+                <a16:creationId xmlns:a16="http://schemas.microsoft.com/office/drawing/2014/main" id="{61F796B6-DA81-2EE3-0B18-F2CD3A58FE06}"/>
               </a:ext>
             </a:extLst>
           </p:cNvPr>
@@ -1091,7 +1091,7 @@
           <p:cNvPr id="3" name="テキスト プレースホルダー 2">
             <a:extLst>
               <a:ext uri="{FF2B5EF4-FFF2-40B4-BE49-F238E27FC236}">
-                <a16:creationId xmlns:a16="http://schemas.microsoft.com/office/drawing/2014/main" id="{B667D48F-A060-B537-F3FE-16C761290C87}"/>
+                <a16:creationId xmlns:a16="http://schemas.microsoft.com/office/drawing/2014/main" id="{573359ED-1009-0B14-46AD-186E2A28EBF3}"/>
               </a:ext>
             </a:extLst>
           </p:cNvPr>
@@ -1216,7 +1216,7 @@
           <p:cNvPr id="4" name="日付プレースホルダー 3">
             <a:extLst>
               <a:ext uri="{FF2B5EF4-FFF2-40B4-BE49-F238E27FC236}">
-                <a16:creationId xmlns:a16="http://schemas.microsoft.com/office/drawing/2014/main" id="{E424CF94-DD5B-BD25-FF17-C21ADA40049B}"/>
+                <a16:creationId xmlns:a16="http://schemas.microsoft.com/office/drawing/2014/main" id="{478860CF-57FE-D01A-58F1-D305C387DD63}"/>
               </a:ext>
             </a:extLst>
           </p:cNvPr>
@@ -1232,7 +1232,7 @@
           <a:bodyPr/>
           <a:lstStyle/>
           <a:p>
-            <a:fld id="{B3066D93-A836-4D7D-B07F-234CAEC6A374}" type="datetimeFigureOut">
+            <a:fld id="{B175E55D-0B30-486F-B5EB-DBBEBFBA1ED5}" type="datetimeFigureOut">
               <a:rPr kumimoji="1" lang="ja-JP" altLang="en-US" smtClean="0"/>
               <a:t>2026/7/30</a:t>
             </a:fld>
@@ -1245,7 +1245,7 @@
           <p:cNvPr id="5" name="フッター プレースホルダー 4">
             <a:extLst>
               <a:ext uri="{FF2B5EF4-FFF2-40B4-BE49-F238E27FC236}">
-                <a16:creationId xmlns:a16="http://schemas.microsoft.com/office/drawing/2014/main" id="{8B48EE85-8914-A659-30C1-319FECF3AF35}"/>
+                <a16:creationId xmlns:a16="http://schemas.microsoft.com/office/drawing/2014/main" id="{583762B4-77DA-2850-B327-BE989500A0A0}"/>
               </a:ext>
             </a:extLst>
           </p:cNvPr>
@@ -1270,7 +1270,7 @@
           <p:cNvPr id="6" name="スライド番号プレースホルダー 5">
             <a:extLst>
               <a:ext uri="{FF2B5EF4-FFF2-40B4-BE49-F238E27FC236}">
-                <a16:creationId xmlns:a16="http://schemas.microsoft.com/office/drawing/2014/main" id="{8FDDF953-FEC8-6B15-A3B0-FD219002248D}"/>
+                <a16:creationId xmlns:a16="http://schemas.microsoft.com/office/drawing/2014/main" id="{7E0087A9-A413-7939-44A9-43FEC2C8814C}"/>
               </a:ext>
             </a:extLst>
           </p:cNvPr>
@@ -1286,7 +1286,7 @@
           <a:bodyPr/>
           <a:lstStyle/>
           <a:p>
-            <a:fld id="{3AB76FAA-6FD1-41DC-A69E-9EC5B86EB5C2}" type="slidenum">
+            <a:fld id="{11E179F6-E3FD-41F4-B931-2F061DA007D0}" type="slidenum">
               <a:rPr kumimoji="1" lang="ja-JP" altLang="en-US" smtClean="0"/>
               <a:t>‹#›</a:t>
             </a:fld>
@@ -1297,7 +1297,7 @@
     </p:spTree>
     <p:extLst>
       <p:ext uri="{BB962C8B-B14F-4D97-AF65-F5344CB8AC3E}">
-        <p14:creationId xmlns:p14="http://schemas.microsoft.com/office/powerpoint/2010/main" val="335203258"/>
+        <p14:creationId xmlns:p14="http://schemas.microsoft.com/office/powerpoint/2010/main" val="2249271085"/>
       </p:ext>
     </p:extLst>
   </p:cSld>
@@ -1329,7 +1329,7 @@
           <p:cNvPr id="2" name="タイトル 1">
             <a:extLst>
               <a:ext uri="{FF2B5EF4-FFF2-40B4-BE49-F238E27FC236}">
-                <a16:creationId xmlns:a16="http://schemas.microsoft.com/office/drawing/2014/main" id="{E60DE023-9E3F-6EB3-D8A3-139AAD4E13CE}"/>
+                <a16:creationId xmlns:a16="http://schemas.microsoft.com/office/drawing/2014/main" id="{89DA8640-37B8-35CB-4501-176D39155148}"/>
               </a:ext>
             </a:extLst>
           </p:cNvPr>
@@ -1357,7 +1357,7 @@
           <p:cNvPr id="3" name="コンテンツ プレースホルダー 2">
             <a:extLst>
               <a:ext uri="{FF2B5EF4-FFF2-40B4-BE49-F238E27FC236}">
-                <a16:creationId xmlns:a16="http://schemas.microsoft.com/office/drawing/2014/main" id="{792488D2-4342-B14E-42FA-16149117214D}"/>
+                <a16:creationId xmlns:a16="http://schemas.microsoft.com/office/drawing/2014/main" id="{8573EDA8-DC2F-B8D0-52F8-30EF4052F1CD}"/>
               </a:ext>
             </a:extLst>
           </p:cNvPr>
@@ -1451,7 +1451,7 @@
           <p:cNvPr id="4" name="コンテンツ プレースホルダー 3">
             <a:extLst>
               <a:ext uri="{FF2B5EF4-FFF2-40B4-BE49-F238E27FC236}">
-                <a16:creationId xmlns:a16="http://schemas.microsoft.com/office/drawing/2014/main" id="{406E88AE-1B44-4169-4319-595DB180A6FD}"/>
+                <a16:creationId xmlns:a16="http://schemas.microsoft.com/office/drawing/2014/main" id="{36C3600C-1BA4-4F07-0D27-755CF5D75067}"/>
               </a:ext>
             </a:extLst>
           </p:cNvPr>
@@ -1545,7 +1545,7 @@
           <p:cNvPr id="5" name="日付プレースホルダー 4">
             <a:extLst>
               <a:ext uri="{FF2B5EF4-FFF2-40B4-BE49-F238E27FC236}">
-                <a16:creationId xmlns:a16="http://schemas.microsoft.com/office/drawing/2014/main" id="{B60E5F28-60F9-465D-1FF0-34C01D637E4A}"/>
+                <a16:creationId xmlns:a16="http://schemas.microsoft.com/office/drawing/2014/main" id="{D2697FE2-4AF1-9EF8-7D3F-0A00A5BE9AAC}"/>
               </a:ext>
             </a:extLst>
           </p:cNvPr>
@@ -1561,7 +1561,7 @@
           <a:bodyPr/>
           <a:lstStyle/>
           <a:p>
-            <a:fld id="{B3066D93-A836-4D7D-B07F-234CAEC6A374}" type="datetimeFigureOut">
+            <a:fld id="{B175E55D-0B30-486F-B5EB-DBBEBFBA1ED5}" type="datetimeFigureOut">
               <a:rPr kumimoji="1" lang="ja-JP" altLang="en-US" smtClean="0"/>
               <a:t>2026/7/30</a:t>
             </a:fld>
@@ -1574,7 +1574,7 @@
           <p:cNvPr id="6" name="フッター プレースホルダー 5">
             <a:extLst>
               <a:ext uri="{FF2B5EF4-FFF2-40B4-BE49-F238E27FC236}">
-                <a16:creationId xmlns:a16="http://schemas.microsoft.com/office/drawing/2014/main" id="{450F52D5-9657-E8C2-9467-1FA0834E4C92}"/>
+                <a16:creationId xmlns:a16="http://schemas.microsoft.com/office/drawing/2014/main" id="{37FD75AE-E343-8A1A-846C-E9E7963A6899}"/>
               </a:ext>
             </a:extLst>
           </p:cNvPr>
@@ -1599,7 +1599,7 @@
           <p:cNvPr id="7" name="スライド番号プレースホルダー 6">
             <a:extLst>
               <a:ext uri="{FF2B5EF4-FFF2-40B4-BE49-F238E27FC236}">
-                <a16:creationId xmlns:a16="http://schemas.microsoft.com/office/drawing/2014/main" id="{2320BD35-69E2-2420-A508-39D3774E5A22}"/>
+                <a16:creationId xmlns:a16="http://schemas.microsoft.com/office/drawing/2014/main" id="{B08C7FB8-D208-0D29-E4D9-7FFE563B6CA4}"/>
               </a:ext>
             </a:extLst>
           </p:cNvPr>
@@ -1615,7 +1615,7 @@
           <a:bodyPr/>
           <a:lstStyle/>
           <a:p>
-            <a:fld id="{3AB76FAA-6FD1-41DC-A69E-9EC5B86EB5C2}" type="slidenum">
+            <a:fld id="{11E179F6-E3FD-41F4-B931-2F061DA007D0}" type="slidenum">
               <a:rPr kumimoji="1" lang="ja-JP" altLang="en-US" smtClean="0"/>
               <a:t>‹#›</a:t>
             </a:fld>
@@ -1626,7 +1626,7 @@
     </p:spTree>
     <p:extLst>
       <p:ext uri="{BB962C8B-B14F-4D97-AF65-F5344CB8AC3E}">
-        <p14:creationId xmlns:p14="http://schemas.microsoft.com/office/powerpoint/2010/main" val="3190814806"/>
+        <p14:creationId xmlns:p14="http://schemas.microsoft.com/office/powerpoint/2010/main" val="2642649046"/>
       </p:ext>
     </p:extLst>
   </p:cSld>
@@ -1658,7 +1658,7 @@
           <p:cNvPr id="2" name="タイトル 1">
             <a:extLst>
               <a:ext uri="{FF2B5EF4-FFF2-40B4-BE49-F238E27FC236}">
-                <a16:creationId xmlns:a16="http://schemas.microsoft.com/office/drawing/2014/main" id="{7F80C7C5-F159-49B2-6BAB-E8726CC0CA48}"/>
+                <a16:creationId xmlns:a16="http://schemas.microsoft.com/office/drawing/2014/main" id="{B29F7B49-06F7-33F5-208D-0DEEEFC7C76C}"/>
               </a:ext>
             </a:extLst>
           </p:cNvPr>
@@ -1691,7 +1691,7 @@
           <p:cNvPr id="3" name="テキスト プレースホルダー 2">
             <a:extLst>
               <a:ext uri="{FF2B5EF4-FFF2-40B4-BE49-F238E27FC236}">
-                <a16:creationId xmlns:a16="http://schemas.microsoft.com/office/drawing/2014/main" id="{9A8B13E9-C5B3-1461-5CAC-19E14E393669}"/>
+                <a16:creationId xmlns:a16="http://schemas.microsoft.com/office/drawing/2014/main" id="{B99EFCE5-E43B-06E4-60AF-83E549AA6E07}"/>
               </a:ext>
             </a:extLst>
           </p:cNvPr>
@@ -1762,7 +1762,7 @@
           <p:cNvPr id="4" name="コンテンツ プレースホルダー 3">
             <a:extLst>
               <a:ext uri="{FF2B5EF4-FFF2-40B4-BE49-F238E27FC236}">
-                <a16:creationId xmlns:a16="http://schemas.microsoft.com/office/drawing/2014/main" id="{BBD984C1-CD17-22BC-B5FC-1DF289CB170C}"/>
+                <a16:creationId xmlns:a16="http://schemas.microsoft.com/office/drawing/2014/main" id="{2DB086A0-7895-C28C-020B-872A2C05DE33}"/>
               </a:ext>
             </a:extLst>
           </p:cNvPr>
@@ -1856,7 +1856,7 @@
           <p:cNvPr id="5" name="テキスト プレースホルダー 4">
             <a:extLst>
               <a:ext uri="{FF2B5EF4-FFF2-40B4-BE49-F238E27FC236}">
-                <a16:creationId xmlns:a16="http://schemas.microsoft.com/office/drawing/2014/main" id="{7D43A288-5DF3-D03F-BC5E-1BB9985732AA}"/>
+                <a16:creationId xmlns:a16="http://schemas.microsoft.com/office/drawing/2014/main" id="{0CCC2B6B-CDFE-AFDF-9B51-7EA02D778947}"/>
               </a:ext>
             </a:extLst>
           </p:cNvPr>
@@ -1927,7 +1927,7 @@
           <p:cNvPr id="6" name="コンテンツ プレースホルダー 5">
             <a:extLst>
               <a:ext uri="{FF2B5EF4-FFF2-40B4-BE49-F238E27FC236}">
-                <a16:creationId xmlns:a16="http://schemas.microsoft.com/office/drawing/2014/main" id="{143A6BA0-E0EB-CF54-B9D1-147520BD76B2}"/>
+                <a16:creationId xmlns:a16="http://schemas.microsoft.com/office/drawing/2014/main" id="{139DEB25-8CF3-5760-4E16-0BFD62B56DF7}"/>
               </a:ext>
             </a:extLst>
           </p:cNvPr>
@@ -2021,7 +2021,7 @@
           <p:cNvPr id="7" name="日付プレースホルダー 6">
             <a:extLst>
               <a:ext uri="{FF2B5EF4-FFF2-40B4-BE49-F238E27FC236}">
-                <a16:creationId xmlns:a16="http://schemas.microsoft.com/office/drawing/2014/main" id="{782E890C-7215-038C-18AE-E97FF0A442B1}"/>
+                <a16:creationId xmlns:a16="http://schemas.microsoft.com/office/drawing/2014/main" id="{F52EF2F9-E05E-E60F-0EB4-BB629BC40C85}"/>
               </a:ext>
             </a:extLst>
           </p:cNvPr>
@@ -2037,7 +2037,7 @@
           <a:bodyPr/>
           <a:lstStyle/>
           <a:p>
-            <a:fld id="{B3066D93-A836-4D7D-B07F-234CAEC6A374}" type="datetimeFigureOut">
+            <a:fld id="{B175E55D-0B30-486F-B5EB-DBBEBFBA1ED5}" type="datetimeFigureOut">
               <a:rPr kumimoji="1" lang="ja-JP" altLang="en-US" smtClean="0"/>
               <a:t>2026/7/30</a:t>
             </a:fld>
@@ -2050,7 +2050,7 @@
           <p:cNvPr id="8" name="フッター プレースホルダー 7">
             <a:extLst>
               <a:ext uri="{FF2B5EF4-FFF2-40B4-BE49-F238E27FC236}">
-                <a16:creationId xmlns:a16="http://schemas.microsoft.com/office/drawing/2014/main" id="{28984752-B7DE-A08F-BED5-D04FAD6A9CC8}"/>
+                <a16:creationId xmlns:a16="http://schemas.microsoft.com/office/drawing/2014/main" id="{4EB992BD-A0DB-223D-AFFF-2A945A993938}"/>
               </a:ext>
             </a:extLst>
           </p:cNvPr>
@@ -2075,7 +2075,7 @@
           <p:cNvPr id="9" name="スライド番号プレースホルダー 8">
             <a:extLst>
               <a:ext uri="{FF2B5EF4-FFF2-40B4-BE49-F238E27FC236}">
-                <a16:creationId xmlns:a16="http://schemas.microsoft.com/office/drawing/2014/main" id="{3EA06087-FC4F-7BA5-8162-7A6A06ACB7E8}"/>
+                <a16:creationId xmlns:a16="http://schemas.microsoft.com/office/drawing/2014/main" id="{53DEABBF-535F-AAF1-6F20-1ABE3E01D48F}"/>
               </a:ext>
             </a:extLst>
           </p:cNvPr>
@@ -2091,7 +2091,7 @@
           <a:bodyPr/>
           <a:lstStyle/>
           <a:p>
-            <a:fld id="{3AB76FAA-6FD1-41DC-A69E-9EC5B86EB5C2}" type="slidenum">
+            <a:fld id="{11E179F6-E3FD-41F4-B931-2F061DA007D0}" type="slidenum">
               <a:rPr kumimoji="1" lang="ja-JP" altLang="en-US" smtClean="0"/>
               <a:t>‹#›</a:t>
             </a:fld>
@@ -2102,7 +2102,7 @@
     </p:spTree>
     <p:extLst>
       <p:ext uri="{BB962C8B-B14F-4D97-AF65-F5344CB8AC3E}">
-        <p14:creationId xmlns:p14="http://schemas.microsoft.com/office/powerpoint/2010/main" val="240048885"/>
+        <p14:creationId xmlns:p14="http://schemas.microsoft.com/office/powerpoint/2010/main" val="2995967929"/>
       </p:ext>
     </p:extLst>
   </p:cSld>
@@ -2134,7 +2134,7 @@
           <p:cNvPr id="2" name="タイトル 1">
             <a:extLst>
               <a:ext uri="{FF2B5EF4-FFF2-40B4-BE49-F238E27FC236}">
-                <a16:creationId xmlns:a16="http://schemas.microsoft.com/office/drawing/2014/main" id="{049E9942-0458-FA8C-D846-4B8FB24765E4}"/>
+                <a16:creationId xmlns:a16="http://schemas.microsoft.com/office/drawing/2014/main" id="{9046AACA-A05C-7206-C0C0-AD69EB7B7A5A}"/>
               </a:ext>
             </a:extLst>
           </p:cNvPr>
@@ -2162,7 +2162,7 @@
           <p:cNvPr id="3" name="日付プレースホルダー 2">
             <a:extLst>
               <a:ext uri="{FF2B5EF4-FFF2-40B4-BE49-F238E27FC236}">
-                <a16:creationId xmlns:a16="http://schemas.microsoft.com/office/drawing/2014/main" id="{84412028-7764-FDC4-2EFD-75278C7B404C}"/>
+                <a16:creationId xmlns:a16="http://schemas.microsoft.com/office/drawing/2014/main" id="{7D073EC3-268A-67FF-3429-E5F7EFB331E4}"/>
               </a:ext>
             </a:extLst>
           </p:cNvPr>
@@ -2178,7 +2178,7 @@
           <a:bodyPr/>
           <a:lstStyle/>
           <a:p>
-            <a:fld id="{B3066D93-A836-4D7D-B07F-234CAEC6A374}" type="datetimeFigureOut">
+            <a:fld id="{B175E55D-0B30-486F-B5EB-DBBEBFBA1ED5}" type="datetimeFigureOut">
               <a:rPr kumimoji="1" lang="ja-JP" altLang="en-US" smtClean="0"/>
               <a:t>2026/7/30</a:t>
             </a:fld>
@@ -2191,7 +2191,7 @@
           <p:cNvPr id="4" name="フッター プレースホルダー 3">
             <a:extLst>
               <a:ext uri="{FF2B5EF4-FFF2-40B4-BE49-F238E27FC236}">
-                <a16:creationId xmlns:a16="http://schemas.microsoft.com/office/drawing/2014/main" id="{BDAD63F9-D40E-32C9-3CFF-D83B2B3DD243}"/>
+                <a16:creationId xmlns:a16="http://schemas.microsoft.com/office/drawing/2014/main" id="{FFBD9688-7B1D-97A5-0182-C8D6518AD96B}"/>
               </a:ext>
             </a:extLst>
           </p:cNvPr>
@@ -2216,7 +2216,7 @@
           <p:cNvPr id="5" name="スライド番号プレースホルダー 4">
             <a:extLst>
               <a:ext uri="{FF2B5EF4-FFF2-40B4-BE49-F238E27FC236}">
-                <a16:creationId xmlns:a16="http://schemas.microsoft.com/office/drawing/2014/main" id="{333EBDC4-C65B-B221-840F-4F0FEC671977}"/>
+                <a16:creationId xmlns:a16="http://schemas.microsoft.com/office/drawing/2014/main" id="{53A4F3F1-4897-AA7B-0C76-93271830366E}"/>
               </a:ext>
             </a:extLst>
           </p:cNvPr>
@@ -2232,7 +2232,7 @@
           <a:bodyPr/>
           <a:lstStyle/>
           <a:p>
-            <a:fld id="{3AB76FAA-6FD1-41DC-A69E-9EC5B86EB5C2}" type="slidenum">
+            <a:fld id="{11E179F6-E3FD-41F4-B931-2F061DA007D0}" type="slidenum">
               <a:rPr kumimoji="1" lang="ja-JP" altLang="en-US" smtClean="0"/>
               <a:t>‹#›</a:t>
             </a:fld>
@@ -2243,7 +2243,7 @@
     </p:spTree>
     <p:extLst>
       <p:ext uri="{BB962C8B-B14F-4D97-AF65-F5344CB8AC3E}">
-        <p14:creationId xmlns:p14="http://schemas.microsoft.com/office/powerpoint/2010/main" val="1455109173"/>
+        <p14:creationId xmlns:p14="http://schemas.microsoft.com/office/powerpoint/2010/main" val="3244823514"/>
       </p:ext>
     </p:extLst>
   </p:cSld>
@@ -2275,7 +2275,7 @@
           <p:cNvPr id="2" name="日付プレースホルダー 1">
             <a:extLst>
               <a:ext uri="{FF2B5EF4-FFF2-40B4-BE49-F238E27FC236}">
-                <a16:creationId xmlns:a16="http://schemas.microsoft.com/office/drawing/2014/main" id="{BA915986-32D8-FBEF-E3EA-3E7AEB357F02}"/>
+                <a16:creationId xmlns:a16="http://schemas.microsoft.com/office/drawing/2014/main" id="{5B870AA8-8A4E-8A1F-B444-BBBB7633EF64}"/>
               </a:ext>
             </a:extLst>
           </p:cNvPr>
@@ -2291,7 +2291,7 @@
           <a:bodyPr/>
           <a:lstStyle/>
           <a:p>
-            <a:fld id="{B3066D93-A836-4D7D-B07F-234CAEC6A374}" type="datetimeFigureOut">
+            <a:fld id="{B175E55D-0B30-486F-B5EB-DBBEBFBA1ED5}" type="datetimeFigureOut">
               <a:rPr kumimoji="1" lang="ja-JP" altLang="en-US" smtClean="0"/>
               <a:t>2026/7/30</a:t>
             </a:fld>
@@ -2304,7 +2304,7 @@
           <p:cNvPr id="3" name="フッター プレースホルダー 2">
             <a:extLst>
               <a:ext uri="{FF2B5EF4-FFF2-40B4-BE49-F238E27FC236}">
-                <a16:creationId xmlns:a16="http://schemas.microsoft.com/office/drawing/2014/main" id="{8DCDCE9B-3C32-2DB4-E808-B9EF8F23DDFE}"/>
+                <a16:creationId xmlns:a16="http://schemas.microsoft.com/office/drawing/2014/main" id="{BA0438D0-889B-2B3D-6A74-BCCBD0949DAF}"/>
               </a:ext>
             </a:extLst>
           </p:cNvPr>
@@ -2329,7 +2329,7 @@
           <p:cNvPr id="4" name="スライド番号プレースホルダー 3">
             <a:extLst>
               <a:ext uri="{FF2B5EF4-FFF2-40B4-BE49-F238E27FC236}">
-                <a16:creationId xmlns:a16="http://schemas.microsoft.com/office/drawing/2014/main" id="{9F3AFFE5-3F0D-AA43-5742-5B56FD866832}"/>
+                <a16:creationId xmlns:a16="http://schemas.microsoft.com/office/drawing/2014/main" id="{14C2EB3F-9E66-FC94-77B9-B337F3B4BB67}"/>
               </a:ext>
             </a:extLst>
           </p:cNvPr>
@@ -2345,7 +2345,7 @@
           <a:bodyPr/>
           <a:lstStyle/>
           <a:p>
-            <a:fld id="{3AB76FAA-6FD1-41DC-A69E-9EC5B86EB5C2}" type="slidenum">
+            <a:fld id="{11E179F6-E3FD-41F4-B931-2F061DA007D0}" type="slidenum">
               <a:rPr kumimoji="1" lang="ja-JP" altLang="en-US" smtClean="0"/>
               <a:t>‹#›</a:t>
             </a:fld>
@@ -2356,7 +2356,7 @@
     </p:spTree>
     <p:extLst>
       <p:ext uri="{BB962C8B-B14F-4D97-AF65-F5344CB8AC3E}">
-        <p14:creationId xmlns:p14="http://schemas.microsoft.com/office/powerpoint/2010/main" val="600044822"/>
+        <p14:creationId xmlns:p14="http://schemas.microsoft.com/office/powerpoint/2010/main" val="2287908810"/>
       </p:ext>
     </p:extLst>
   </p:cSld>
@@ -2388,7 +2388,7 @@
           <p:cNvPr id="2" name="タイトル 1">
             <a:extLst>
               <a:ext uri="{FF2B5EF4-FFF2-40B4-BE49-F238E27FC236}">
-                <a16:creationId xmlns:a16="http://schemas.microsoft.com/office/drawing/2014/main" id="{2BC8663F-19B3-899A-3F7E-E26C19D7938F}"/>
+                <a16:creationId xmlns:a16="http://schemas.microsoft.com/office/drawing/2014/main" id="{D4C7A6E2-F6E6-4E5A-2910-83789263D67A}"/>
               </a:ext>
             </a:extLst>
           </p:cNvPr>
@@ -2425,7 +2425,7 @@
           <p:cNvPr id="3" name="コンテンツ プレースホルダー 2">
             <a:extLst>
               <a:ext uri="{FF2B5EF4-FFF2-40B4-BE49-F238E27FC236}">
-                <a16:creationId xmlns:a16="http://schemas.microsoft.com/office/drawing/2014/main" id="{2A3955DC-E5BB-43FE-5D30-4D56EF56C0E0}"/>
+                <a16:creationId xmlns:a16="http://schemas.microsoft.com/office/drawing/2014/main" id="{AEAD6E4C-AAAF-A0A5-F770-F4A820BE7E2C}"/>
               </a:ext>
             </a:extLst>
           </p:cNvPr>
@@ -2547,7 +2547,7 @@
           <p:cNvPr id="4" name="テキスト プレースホルダー 3">
             <a:extLst>
               <a:ext uri="{FF2B5EF4-FFF2-40B4-BE49-F238E27FC236}">
-                <a16:creationId xmlns:a16="http://schemas.microsoft.com/office/drawing/2014/main" id="{A8149A30-72E9-A3ED-4AB9-4596A31AEE36}"/>
+                <a16:creationId xmlns:a16="http://schemas.microsoft.com/office/drawing/2014/main" id="{EF640532-0DEA-CFB6-C3A9-96A77EE1E062}"/>
               </a:ext>
             </a:extLst>
           </p:cNvPr>
@@ -2618,7 +2618,7 @@
           <p:cNvPr id="5" name="日付プレースホルダー 4">
             <a:extLst>
               <a:ext uri="{FF2B5EF4-FFF2-40B4-BE49-F238E27FC236}">
-                <a16:creationId xmlns:a16="http://schemas.microsoft.com/office/drawing/2014/main" id="{93D16841-09CB-4357-AE10-706DC629F0FB}"/>
+                <a16:creationId xmlns:a16="http://schemas.microsoft.com/office/drawing/2014/main" id="{E470BA92-1161-EA8E-7C10-68B3D85BCB94}"/>
               </a:ext>
             </a:extLst>
           </p:cNvPr>
@@ -2634,7 +2634,7 @@
           <a:bodyPr/>
           <a:lstStyle/>
           <a:p>
-            <a:fld id="{B3066D93-A836-4D7D-B07F-234CAEC6A374}" type="datetimeFigureOut">
+            <a:fld id="{B175E55D-0B30-486F-B5EB-DBBEBFBA1ED5}" type="datetimeFigureOut">
               <a:rPr kumimoji="1" lang="ja-JP" altLang="en-US" smtClean="0"/>
               <a:t>2026/7/30</a:t>
             </a:fld>
@@ -2647,7 +2647,7 @@
           <p:cNvPr id="6" name="フッター プレースホルダー 5">
             <a:extLst>
               <a:ext uri="{FF2B5EF4-FFF2-40B4-BE49-F238E27FC236}">
-                <a16:creationId xmlns:a16="http://schemas.microsoft.com/office/drawing/2014/main" id="{248017BF-DCD4-2DE7-1AD0-7F031EA76FC4}"/>
+                <a16:creationId xmlns:a16="http://schemas.microsoft.com/office/drawing/2014/main" id="{5F0B17FE-83AD-B444-9625-B47FB1F10CCD}"/>
               </a:ext>
             </a:extLst>
           </p:cNvPr>
@@ -2672,7 +2672,7 @@
           <p:cNvPr id="7" name="スライド番号プレースホルダー 6">
             <a:extLst>
               <a:ext uri="{FF2B5EF4-FFF2-40B4-BE49-F238E27FC236}">
-                <a16:creationId xmlns:a16="http://schemas.microsoft.com/office/drawing/2014/main" id="{22C448E3-9D7B-85A7-DF80-A05960212712}"/>
+                <a16:creationId xmlns:a16="http://schemas.microsoft.com/office/drawing/2014/main" id="{261B58D5-A808-A516-3A0D-7C34941F0E92}"/>
               </a:ext>
             </a:extLst>
           </p:cNvPr>
@@ -2688,7 +2688,7 @@
           <a:bodyPr/>
           <a:lstStyle/>
           <a:p>
-            <a:fld id="{3AB76FAA-6FD1-41DC-A69E-9EC5B86EB5C2}" type="slidenum">
+            <a:fld id="{11E179F6-E3FD-41F4-B931-2F061DA007D0}" type="slidenum">
               <a:rPr kumimoji="1" lang="ja-JP" altLang="en-US" smtClean="0"/>
               <a:t>‹#›</a:t>
             </a:fld>
@@ -2699,7 +2699,7 @@
     </p:spTree>
     <p:extLst>
       <p:ext uri="{BB962C8B-B14F-4D97-AF65-F5344CB8AC3E}">
-        <p14:creationId xmlns:p14="http://schemas.microsoft.com/office/powerpoint/2010/main" val="3341590754"/>
+        <p14:creationId xmlns:p14="http://schemas.microsoft.com/office/powerpoint/2010/main" val="2893928510"/>
       </p:ext>
     </p:extLst>
   </p:cSld>
@@ -2731,7 +2731,7 @@
           <p:cNvPr id="2" name="タイトル 1">
             <a:extLst>
               <a:ext uri="{FF2B5EF4-FFF2-40B4-BE49-F238E27FC236}">
-                <a16:creationId xmlns:a16="http://schemas.microsoft.com/office/drawing/2014/main" id="{7E87108E-73DC-CF35-A7F1-7F3C7A19F7CB}"/>
+                <a16:creationId xmlns:a16="http://schemas.microsoft.com/office/drawing/2014/main" id="{ACC2F9BF-7866-0AE9-950E-B0F04B0EC6BF}"/>
               </a:ext>
             </a:extLst>
           </p:cNvPr>
@@ -2768,7 +2768,7 @@
           <p:cNvPr id="3" name="図プレースホルダー 2">
             <a:extLst>
               <a:ext uri="{FF2B5EF4-FFF2-40B4-BE49-F238E27FC236}">
-                <a16:creationId xmlns:a16="http://schemas.microsoft.com/office/drawing/2014/main" id="{3438FDAA-E466-0559-4C14-6132B9500A73}"/>
+                <a16:creationId xmlns:a16="http://schemas.microsoft.com/office/drawing/2014/main" id="{9D809D68-5B8B-D057-D5B4-EE2ECA1D58D4}"/>
               </a:ext>
             </a:extLst>
           </p:cNvPr>
@@ -2835,7 +2835,7 @@
           <p:cNvPr id="4" name="テキスト プレースホルダー 3">
             <a:extLst>
               <a:ext uri="{FF2B5EF4-FFF2-40B4-BE49-F238E27FC236}">
-                <a16:creationId xmlns:a16="http://schemas.microsoft.com/office/drawing/2014/main" id="{6BCC3968-6A40-CE1D-5BBC-69B3044F3895}"/>
+                <a16:creationId xmlns:a16="http://schemas.microsoft.com/office/drawing/2014/main" id="{151F10AF-8B16-D83D-965C-B26A187DBE94}"/>
               </a:ext>
             </a:extLst>
           </p:cNvPr>
@@ -2906,7 +2906,7 @@
           <p:cNvPr id="5" name="日付プレースホルダー 4">
             <a:extLst>
               <a:ext uri="{FF2B5EF4-FFF2-40B4-BE49-F238E27FC236}">
-                <a16:creationId xmlns:a16="http://schemas.microsoft.com/office/drawing/2014/main" id="{3EBA72B7-B02B-76CA-DB4B-C089B0C25B1D}"/>
+                <a16:creationId xmlns:a16="http://schemas.microsoft.com/office/drawing/2014/main" id="{CD3D44DC-AAF2-851B-8F78-AA77F9F61C8F}"/>
               </a:ext>
             </a:extLst>
           </p:cNvPr>
@@ -2922,7 +2922,7 @@
           <a:bodyPr/>
           <a:lstStyle/>
           <a:p>
-            <a:fld id="{B3066D93-A836-4D7D-B07F-234CAEC6A374}" type="datetimeFigureOut">
+            <a:fld id="{B175E55D-0B30-486F-B5EB-DBBEBFBA1ED5}" type="datetimeFigureOut">
               <a:rPr kumimoji="1" lang="ja-JP" altLang="en-US" smtClean="0"/>
               <a:t>2026/7/30</a:t>
             </a:fld>
@@ -2935,7 +2935,7 @@
           <p:cNvPr id="6" name="フッター プレースホルダー 5">
             <a:extLst>
               <a:ext uri="{FF2B5EF4-FFF2-40B4-BE49-F238E27FC236}">
-                <a16:creationId xmlns:a16="http://schemas.microsoft.com/office/drawing/2014/main" id="{32520981-B9CE-F93D-1117-72327C04B206}"/>
+                <a16:creationId xmlns:a16="http://schemas.microsoft.com/office/drawing/2014/main" id="{D9207903-7C01-D8E1-D6EA-BF9332F7DC09}"/>
               </a:ext>
             </a:extLst>
           </p:cNvPr>
@@ -2960,7 +2960,7 @@
           <p:cNvPr id="7" name="スライド番号プレースホルダー 6">
             <a:extLst>
               <a:ext uri="{FF2B5EF4-FFF2-40B4-BE49-F238E27FC236}">
-                <a16:creationId xmlns:a16="http://schemas.microsoft.com/office/drawing/2014/main" id="{58A09971-B540-6AF0-464E-306B89099D09}"/>
+                <a16:creationId xmlns:a16="http://schemas.microsoft.com/office/drawing/2014/main" id="{96479020-7BB0-7C23-55E6-920C4209AF90}"/>
               </a:ext>
             </a:extLst>
           </p:cNvPr>
@@ -2976,7 +2976,7 @@
           <a:bodyPr/>
           <a:lstStyle/>
           <a:p>
-            <a:fld id="{3AB76FAA-6FD1-41DC-A69E-9EC5B86EB5C2}" type="slidenum">
+            <a:fld id="{11E179F6-E3FD-41F4-B931-2F061DA007D0}" type="slidenum">
               <a:rPr kumimoji="1" lang="ja-JP" altLang="en-US" smtClean="0"/>
               <a:t>‹#›</a:t>
             </a:fld>
@@ -2987,7 +2987,7 @@
     </p:spTree>
     <p:extLst>
       <p:ext uri="{BB962C8B-B14F-4D97-AF65-F5344CB8AC3E}">
-        <p14:creationId xmlns:p14="http://schemas.microsoft.com/office/powerpoint/2010/main" val="4278106376"/>
+        <p14:creationId xmlns:p14="http://schemas.microsoft.com/office/powerpoint/2010/main" val="1830978681"/>
       </p:ext>
     </p:extLst>
   </p:cSld>
@@ -3024,7 +3024,7 @@
           <p:cNvPr id="2" name="タイトル プレースホルダー 1">
             <a:extLst>
               <a:ext uri="{FF2B5EF4-FFF2-40B4-BE49-F238E27FC236}">
-                <a16:creationId xmlns:a16="http://schemas.microsoft.com/office/drawing/2014/main" id="{E30AA13C-4243-25D3-92AC-FD0813F580C5}"/>
+                <a16:creationId xmlns:a16="http://schemas.microsoft.com/office/drawing/2014/main" id="{1B42A8D8-B576-6432-6DEA-CC3CB89BC741}"/>
               </a:ext>
             </a:extLst>
           </p:cNvPr>
@@ -3062,7 +3062,7 @@
           <p:cNvPr id="3" name="テキスト プレースホルダー 2">
             <a:extLst>
               <a:ext uri="{FF2B5EF4-FFF2-40B4-BE49-F238E27FC236}">
-                <a16:creationId xmlns:a16="http://schemas.microsoft.com/office/drawing/2014/main" id="{80424EB8-B462-169F-7788-B35AA3E824C7}"/>
+                <a16:creationId xmlns:a16="http://schemas.microsoft.com/office/drawing/2014/main" id="{1AC711FD-35E7-8772-8B75-47DDC4957985}"/>
               </a:ext>
             </a:extLst>
           </p:cNvPr>
@@ -3161,7 +3161,7 @@
           <p:cNvPr id="4" name="日付プレースホルダー 3">
             <a:extLst>
               <a:ext uri="{FF2B5EF4-FFF2-40B4-BE49-F238E27FC236}">
-                <a16:creationId xmlns:a16="http://schemas.microsoft.com/office/drawing/2014/main" id="{25B63EA0-860D-F206-9D84-7C8F99325063}"/>
+                <a16:creationId xmlns:a16="http://schemas.microsoft.com/office/drawing/2014/main" id="{9A57536A-04F5-58DC-E324-2C5EE5ADE54E}"/>
               </a:ext>
             </a:extLst>
           </p:cNvPr>
@@ -3195,7 +3195,7 @@
             </a:lvl1pPr>
           </a:lstStyle>
           <a:p>
-            <a:fld id="{B3066D93-A836-4D7D-B07F-234CAEC6A374}" type="datetimeFigureOut">
+            <a:fld id="{B175E55D-0B30-486F-B5EB-DBBEBFBA1ED5}" type="datetimeFigureOut">
               <a:rPr kumimoji="1" lang="ja-JP" altLang="en-US" smtClean="0"/>
               <a:t>2026/7/30</a:t>
             </a:fld>
@@ -3208,7 +3208,7 @@
           <p:cNvPr id="5" name="フッター プレースホルダー 4">
             <a:extLst>
               <a:ext uri="{FF2B5EF4-FFF2-40B4-BE49-F238E27FC236}">
-                <a16:creationId xmlns:a16="http://schemas.microsoft.com/office/drawing/2014/main" id="{3ADBCB09-EAE4-737D-B122-1C6B581383BC}"/>
+                <a16:creationId xmlns:a16="http://schemas.microsoft.com/office/drawing/2014/main" id="{66ED8599-ED70-5685-391A-71850219415C}"/>
               </a:ext>
             </a:extLst>
           </p:cNvPr>
@@ -3251,7 +3251,7 @@
           <p:cNvPr id="6" name="スライド番号プレースホルダー 5">
             <a:extLst>
               <a:ext uri="{FF2B5EF4-FFF2-40B4-BE49-F238E27FC236}">
-                <a16:creationId xmlns:a16="http://schemas.microsoft.com/office/drawing/2014/main" id="{F4724915-E1C0-ACE6-22A3-47B2AB3CF908}"/>
+                <a16:creationId xmlns:a16="http://schemas.microsoft.com/office/drawing/2014/main" id="{7052742C-4A9A-A97A-8EDE-015F754AB647}"/>
               </a:ext>
             </a:extLst>
           </p:cNvPr>
@@ -3285,7 +3285,7 @@
             </a:lvl1pPr>
           </a:lstStyle>
           <a:p>
-            <a:fld id="{3AB76FAA-6FD1-41DC-A69E-9EC5B86EB5C2}" type="slidenum">
+            <a:fld id="{11E179F6-E3FD-41F4-B931-2F061DA007D0}" type="slidenum">
               <a:rPr kumimoji="1" lang="ja-JP" altLang="en-US" smtClean="0"/>
               <a:t>‹#›</a:t>
             </a:fld>
@@ -3296,7 +3296,7 @@
     </p:spTree>
     <p:extLst>
       <p:ext uri="{BB962C8B-B14F-4D97-AF65-F5344CB8AC3E}">
-        <p14:creationId xmlns:p14="http://schemas.microsoft.com/office/powerpoint/2010/main" val="3879976662"/>
+        <p14:creationId xmlns:p14="http://schemas.microsoft.com/office/powerpoint/2010/main" val="3373738291"/>
       </p:ext>
     </p:extLst>
   </p:cSld>
@@ -3619,7 +3619,7 @@
           <p:cNvPr id="2" name="テキスト ボックス 1">
             <a:extLst>
               <a:ext uri="{FF2B5EF4-FFF2-40B4-BE49-F238E27FC236}">
-                <a16:creationId xmlns:a16="http://schemas.microsoft.com/office/drawing/2014/main" id="{EA837892-7A8C-3AC7-B3FA-9F32AC32A0B9}"/>
+                <a16:creationId xmlns:a16="http://schemas.microsoft.com/office/drawing/2014/main" id="{42738257-FFEC-8C27-CDAC-5928BA7F57CB}"/>
               </a:ext>
             </a:extLst>
           </p:cNvPr>
@@ -3665,7 +3665,7 @@
           <p:cNvPr id="3" name="テキスト ボックス 2">
             <a:extLst>
               <a:ext uri="{FF2B5EF4-FFF2-40B4-BE49-F238E27FC236}">
-                <a16:creationId xmlns:a16="http://schemas.microsoft.com/office/drawing/2014/main" id="{B0443060-9D0A-CEBB-3735-59E15D1A1A28}"/>
+                <a16:creationId xmlns:a16="http://schemas.microsoft.com/office/drawing/2014/main" id="{49D12B98-64E5-754D-FB97-1A0A2CFE1525}"/>
               </a:ext>
             </a:extLst>
           </p:cNvPr>
@@ -3714,7 +3714,7 @@
           <p:cNvPr id="4" name="テキスト ボックス 3">
             <a:extLst>
               <a:ext uri="{FF2B5EF4-FFF2-40B4-BE49-F238E27FC236}">
-                <a16:creationId xmlns:a16="http://schemas.microsoft.com/office/drawing/2014/main" id="{6F1F65FA-3C9E-3418-8066-265789C6E978}"/>
+                <a16:creationId xmlns:a16="http://schemas.microsoft.com/office/drawing/2014/main" id="{231AF76C-C9FA-1558-6881-4F3F66015132}"/>
               </a:ext>
             </a:extLst>
           </p:cNvPr>
@@ -3754,7 +3754,7 @@
           <p:cNvPr id="5" name="テキスト ボックス 4">
             <a:extLst>
               <a:ext uri="{FF2B5EF4-FFF2-40B4-BE49-F238E27FC236}">
-                <a16:creationId xmlns:a16="http://schemas.microsoft.com/office/drawing/2014/main" id="{A067398B-A821-D181-7A5A-738E29F35A1A}"/>
+                <a16:creationId xmlns:a16="http://schemas.microsoft.com/office/drawing/2014/main" id="{74DEC17E-4FA8-BF6F-5890-9AD168C703A1}"/>
               </a:ext>
             </a:extLst>
           </p:cNvPr>
@@ -3801,7 +3801,7 @@
             <a:hlinkClick r:id="" action="ppaction://media"/>
             <a:extLst>
               <a:ext uri="{FF2B5EF4-FFF2-40B4-BE49-F238E27FC236}">
-                <a16:creationId xmlns:a16="http://schemas.microsoft.com/office/drawing/2014/main" id="{FB6BC276-901E-126F-A34D-58252739795A}"/>
+                <a16:creationId xmlns:a16="http://schemas.microsoft.com/office/drawing/2014/main" id="{45AFD3C1-C107-3B76-E746-234C8CA1F46A}"/>
               </a:ext>
             </a:extLst>
           </p:cNvPr>
@@ -3836,7 +3836,7 @@
     </p:spTree>
     <p:extLst>
       <p:ext uri="{BB962C8B-B14F-4D97-AF65-F5344CB8AC3E}">
-        <p14:creationId xmlns:p14="http://schemas.microsoft.com/office/powerpoint/2010/main" val="3631695431"/>
+        <p14:creationId xmlns:p14="http://schemas.microsoft.com/office/powerpoint/2010/main" val="2073490016"/>
       </p:ext>
     </p:extLst>
   </p:cSld>
@@ -3960,7 +3960,7 @@
           <p:cNvPr id="2" name="テキスト ボックス 1">
             <a:extLst>
               <a:ext uri="{FF2B5EF4-FFF2-40B4-BE49-F238E27FC236}">
-                <a16:creationId xmlns:a16="http://schemas.microsoft.com/office/drawing/2014/main" id="{1DF3B82A-45A7-79E3-AB20-C887B52A3325}"/>
+                <a16:creationId xmlns:a16="http://schemas.microsoft.com/office/drawing/2014/main" id="{9B349FCE-463B-1C45-46BC-8B022EB29116}"/>
               </a:ext>
             </a:extLst>
           </p:cNvPr>
@@ -4006,7 +4006,7 @@
           <p:cNvPr id="3" name="テキスト ボックス 2">
             <a:extLst>
               <a:ext uri="{FF2B5EF4-FFF2-40B4-BE49-F238E27FC236}">
-                <a16:creationId xmlns:a16="http://schemas.microsoft.com/office/drawing/2014/main" id="{E8DDADCB-8D3C-EBF7-5080-CA6A5123625D}"/>
+                <a16:creationId xmlns:a16="http://schemas.microsoft.com/office/drawing/2014/main" id="{2000E107-9D19-9454-5FF5-40C7F868368E}"/>
               </a:ext>
             </a:extLst>
           </p:cNvPr>
@@ -4046,7 +4046,7 @@
           <p:cNvPr id="4" name="テキスト ボックス 3">
             <a:extLst>
               <a:ext uri="{FF2B5EF4-FFF2-40B4-BE49-F238E27FC236}">
-                <a16:creationId xmlns:a16="http://schemas.microsoft.com/office/drawing/2014/main" id="{30A16DF4-64CA-4D03-ADC7-EA63C1A5703C}"/>
+                <a16:creationId xmlns:a16="http://schemas.microsoft.com/office/drawing/2014/main" id="{1B33DAEA-90C0-CEF1-583E-AAA1E401987B}"/>
               </a:ext>
             </a:extLst>
           </p:cNvPr>
@@ -4140,7 +4140,7 @@
           <p:cNvPr id="5" name="テキスト ボックス 4">
             <a:extLst>
               <a:ext uri="{FF2B5EF4-FFF2-40B4-BE49-F238E27FC236}">
-                <a16:creationId xmlns:a16="http://schemas.microsoft.com/office/drawing/2014/main" id="{79791A13-7C4D-5FEC-C6A1-A8FD88ABDA8B}"/>
+                <a16:creationId xmlns:a16="http://schemas.microsoft.com/office/drawing/2014/main" id="{BD86CAA2-E598-CA3B-8759-ACE7EBFF675D}"/>
               </a:ext>
             </a:extLst>
           </p:cNvPr>
@@ -4187,7 +4187,7 @@
             <a:hlinkClick r:id="" action="ppaction://media"/>
             <a:extLst>
               <a:ext uri="{FF2B5EF4-FFF2-40B4-BE49-F238E27FC236}">
-                <a16:creationId xmlns:a16="http://schemas.microsoft.com/office/drawing/2014/main" id="{75C36772-752B-F3A0-8118-980F2F81AA90}"/>
+                <a16:creationId xmlns:a16="http://schemas.microsoft.com/office/drawing/2014/main" id="{7C1ED088-9B1C-8543-428B-F6F32CC45C97}"/>
               </a:ext>
             </a:extLst>
           </p:cNvPr>
@@ -4222,7 +4222,7 @@
     </p:spTree>
     <p:extLst>
       <p:ext uri="{BB962C8B-B14F-4D97-AF65-F5344CB8AC3E}">
-        <p14:creationId xmlns:p14="http://schemas.microsoft.com/office/powerpoint/2010/main" val="2422241368"/>
+        <p14:creationId xmlns:p14="http://schemas.microsoft.com/office/powerpoint/2010/main" val="1407426623"/>
       </p:ext>
     </p:extLst>
   </p:cSld>
@@ -4346,7 +4346,7 @@
           <p:cNvPr id="2" name="テキスト ボックス 1">
             <a:extLst>
               <a:ext uri="{FF2B5EF4-FFF2-40B4-BE49-F238E27FC236}">
-                <a16:creationId xmlns:a16="http://schemas.microsoft.com/office/drawing/2014/main" id="{D6D0438E-A358-C9D0-2743-D345BB1AFB2C}"/>
+                <a16:creationId xmlns:a16="http://schemas.microsoft.com/office/drawing/2014/main" id="{A738CA08-9A7E-2AE5-E4AC-9C04E0A4D5C4}"/>
               </a:ext>
             </a:extLst>
           </p:cNvPr>
@@ -4392,7 +4392,7 @@
           <p:cNvPr id="3" name="テキスト ボックス 2">
             <a:extLst>
               <a:ext uri="{FF2B5EF4-FFF2-40B4-BE49-F238E27FC236}">
-                <a16:creationId xmlns:a16="http://schemas.microsoft.com/office/drawing/2014/main" id="{10433A73-D243-3191-A300-3383BA29FC2B}"/>
+                <a16:creationId xmlns:a16="http://schemas.microsoft.com/office/drawing/2014/main" id="{9AAD49ED-3554-0E71-553B-197670A9B4CB}"/>
               </a:ext>
             </a:extLst>
           </p:cNvPr>
@@ -4432,7 +4432,7 @@
           <p:cNvPr id="4" name="テキスト ボックス 3">
             <a:extLst>
               <a:ext uri="{FF2B5EF4-FFF2-40B4-BE49-F238E27FC236}">
-                <a16:creationId xmlns:a16="http://schemas.microsoft.com/office/drawing/2014/main" id="{65C30398-4928-F97C-1C89-553C70160BA9}"/>
+                <a16:creationId xmlns:a16="http://schemas.microsoft.com/office/drawing/2014/main" id="{20E1ABD6-C1A6-84C3-0475-9520D2072B0E}"/>
               </a:ext>
             </a:extLst>
           </p:cNvPr>
@@ -4527,7 +4527,7 @@
           <p:cNvPr id="5" name="テキスト ボックス 4">
             <a:extLst>
               <a:ext uri="{FF2B5EF4-FFF2-40B4-BE49-F238E27FC236}">
-                <a16:creationId xmlns:a16="http://schemas.microsoft.com/office/drawing/2014/main" id="{4548AE74-B98B-1EE3-BA3B-C10C4606AF13}"/>
+                <a16:creationId xmlns:a16="http://schemas.microsoft.com/office/drawing/2014/main" id="{EF9128B6-0928-8F20-0A0F-990D7011BF85}"/>
               </a:ext>
             </a:extLst>
           </p:cNvPr>
@@ -4574,7 +4574,7 @@
             <a:hlinkClick r:id="" action="ppaction://media"/>
             <a:extLst>
               <a:ext uri="{FF2B5EF4-FFF2-40B4-BE49-F238E27FC236}">
-                <a16:creationId xmlns:a16="http://schemas.microsoft.com/office/drawing/2014/main" id="{EEB53A93-44D1-B3D3-445E-827962C10FBC}"/>
+                <a16:creationId xmlns:a16="http://schemas.microsoft.com/office/drawing/2014/main" id="{78CCE689-E178-18CB-3072-71095846A0CF}"/>
               </a:ext>
             </a:extLst>
           </p:cNvPr>
@@ -4609,7 +4609,7 @@
     </p:spTree>
     <p:extLst>
       <p:ext uri="{BB962C8B-B14F-4D97-AF65-F5344CB8AC3E}">
-        <p14:creationId xmlns:p14="http://schemas.microsoft.com/office/powerpoint/2010/main" val="4027794905"/>
+        <p14:creationId xmlns:p14="http://schemas.microsoft.com/office/powerpoint/2010/main" val="3741494926"/>
       </p:ext>
     </p:extLst>
   </p:cSld>
@@ -4733,7 +4733,7 @@
           <p:cNvPr id="2" name="テキスト ボックス 1">
             <a:extLst>
               <a:ext uri="{FF2B5EF4-FFF2-40B4-BE49-F238E27FC236}">
-                <a16:creationId xmlns:a16="http://schemas.microsoft.com/office/drawing/2014/main" id="{05E2BDBC-6854-E8E5-6CFB-F866FB00F208}"/>
+                <a16:creationId xmlns:a16="http://schemas.microsoft.com/office/drawing/2014/main" id="{1B8DDFD0-5A65-701F-AF09-74C1E27394EF}"/>
               </a:ext>
             </a:extLst>
           </p:cNvPr>
@@ -4779,7 +4779,7 @@
           <p:cNvPr id="3" name="テキスト ボックス 2">
             <a:extLst>
               <a:ext uri="{FF2B5EF4-FFF2-40B4-BE49-F238E27FC236}">
-                <a16:creationId xmlns:a16="http://schemas.microsoft.com/office/drawing/2014/main" id="{E69B6EAE-A50B-145F-971E-0DFDCEABF2CE}"/>
+                <a16:creationId xmlns:a16="http://schemas.microsoft.com/office/drawing/2014/main" id="{6BB82DF5-380F-E72A-DE11-0E639E8ABF76}"/>
               </a:ext>
             </a:extLst>
           </p:cNvPr>
@@ -4819,7 +4819,7 @@
           <p:cNvPr id="4" name="テキスト ボックス 3">
             <a:extLst>
               <a:ext uri="{FF2B5EF4-FFF2-40B4-BE49-F238E27FC236}">
-                <a16:creationId xmlns:a16="http://schemas.microsoft.com/office/drawing/2014/main" id="{E25B4421-90DB-A3C4-CFB8-13F8C7C45894}"/>
+                <a16:creationId xmlns:a16="http://schemas.microsoft.com/office/drawing/2014/main" id="{A05F5237-4224-4D09-488A-6B9EF21AEFEE}"/>
               </a:ext>
             </a:extLst>
           </p:cNvPr>
@@ -4929,7 +4929,7 @@
           <p:cNvPr id="5" name="テキスト ボックス 4">
             <a:extLst>
               <a:ext uri="{FF2B5EF4-FFF2-40B4-BE49-F238E27FC236}">
-                <a16:creationId xmlns:a16="http://schemas.microsoft.com/office/drawing/2014/main" id="{535E3115-1025-D12F-9866-F91EE8A0CD25}"/>
+                <a16:creationId xmlns:a16="http://schemas.microsoft.com/office/drawing/2014/main" id="{548137A1-755C-E310-2D78-A3C3B3088803}"/>
               </a:ext>
             </a:extLst>
           </p:cNvPr>
@@ -4976,7 +4976,7 @@
             <a:hlinkClick r:id="" action="ppaction://media"/>
             <a:extLst>
               <a:ext uri="{FF2B5EF4-FFF2-40B4-BE49-F238E27FC236}">
-                <a16:creationId xmlns:a16="http://schemas.microsoft.com/office/drawing/2014/main" id="{B2ED6BAB-1E39-59FC-9DE7-BBE9430E548E}"/>
+                <a16:creationId xmlns:a16="http://schemas.microsoft.com/office/drawing/2014/main" id="{50F820C9-301D-9AC9-3930-C4AA80161C56}"/>
               </a:ext>
             </a:extLst>
           </p:cNvPr>
@@ -5011,7 +5011,7 @@
     </p:spTree>
     <p:extLst>
       <p:ext uri="{BB962C8B-B14F-4D97-AF65-F5344CB8AC3E}">
-        <p14:creationId xmlns:p14="http://schemas.microsoft.com/office/powerpoint/2010/main" val="4052650608"/>
+        <p14:creationId xmlns:p14="http://schemas.microsoft.com/office/powerpoint/2010/main" val="2229098557"/>
       </p:ext>
     </p:extLst>
   </p:cSld>
@@ -5135,7 +5135,7 @@
           <p:cNvPr id="2" name="テキスト ボックス 1">
             <a:extLst>
               <a:ext uri="{FF2B5EF4-FFF2-40B4-BE49-F238E27FC236}">
-                <a16:creationId xmlns:a16="http://schemas.microsoft.com/office/drawing/2014/main" id="{FF45D186-EA8B-AA7E-491A-F0E1EA691ACD}"/>
+                <a16:creationId xmlns:a16="http://schemas.microsoft.com/office/drawing/2014/main" id="{8E9DBD21-F6A8-52C8-FC48-6E2E73CD3A79}"/>
               </a:ext>
             </a:extLst>
           </p:cNvPr>
@@ -5181,7 +5181,7 @@
           <p:cNvPr id="3" name="テキスト ボックス 2">
             <a:extLst>
               <a:ext uri="{FF2B5EF4-FFF2-40B4-BE49-F238E27FC236}">
-                <a16:creationId xmlns:a16="http://schemas.microsoft.com/office/drawing/2014/main" id="{E1A92642-E6C9-B62F-6348-078F1853E560}"/>
+                <a16:creationId xmlns:a16="http://schemas.microsoft.com/office/drawing/2014/main" id="{07251BD4-F4FA-ABCB-1AE0-518D28FFC1B8}"/>
               </a:ext>
             </a:extLst>
           </p:cNvPr>
@@ -5221,7 +5221,7 @@
           <p:cNvPr id="4" name="テキスト ボックス 3">
             <a:extLst>
               <a:ext uri="{FF2B5EF4-FFF2-40B4-BE49-F238E27FC236}">
-                <a16:creationId xmlns:a16="http://schemas.microsoft.com/office/drawing/2014/main" id="{4FB47556-B1EE-5C17-401B-82FE06BCA84B}"/>
+                <a16:creationId xmlns:a16="http://schemas.microsoft.com/office/drawing/2014/main" id="{CDFE512B-F407-0340-9871-0146411FDA34}"/>
               </a:ext>
             </a:extLst>
           </p:cNvPr>
@@ -5245,20 +5245,14 @@
           <a:lstStyle/>
           <a:p>
             <a:r>
-              <a:rPr kumimoji="1" lang="en-US" altLang="ja-JP" sz="2000">
+              <a:rPr kumimoji="1" lang="ja-JP" altLang="en-US" sz="2000">
                 <a:solidFill>
                   <a:srgbClr val="333333"/>
                 </a:solidFill>
                 <a:latin typeface="Arial" panose="020B0604020202020204" pitchFamily="34" charset="0"/>
               </a:rPr>
-              <a:t>Add kaitenheiten alerts and revenue flows</a:t>
-            </a:r>
-            <a:endParaRPr kumimoji="1" lang="ja-JP" altLang="en-US" sz="2000">
-              <a:solidFill>
-                <a:srgbClr val="333333"/>
-              </a:solidFill>
-              <a:latin typeface="Arial" panose="020B0604020202020204" pitchFamily="34" charset="0"/>
-            </a:endParaRPr>
+              <a:t>直近のコミットでは、新機能の追加と実装強化が行われました。</a:t>
+            </a:r>
           </a:p>
         </p:txBody>
       </p:sp>
@@ -5267,7 +5261,7 @@
           <p:cNvPr id="5" name="テキスト ボックス 4">
             <a:extLst>
               <a:ext uri="{FF2B5EF4-FFF2-40B4-BE49-F238E27FC236}">
-                <a16:creationId xmlns:a16="http://schemas.microsoft.com/office/drawing/2014/main" id="{111AD625-9824-57C5-21EC-FEC085E19E1F}"/>
+                <a16:creationId xmlns:a16="http://schemas.microsoft.com/office/drawing/2014/main" id="{6CFF0E25-D279-E6FF-01B2-72131D9F92E4}"/>
               </a:ext>
             </a:extLst>
           </p:cNvPr>
@@ -5314,7 +5308,7 @@
             <a:hlinkClick r:id="" action="ppaction://media"/>
             <a:extLst>
               <a:ext uri="{FF2B5EF4-FFF2-40B4-BE49-F238E27FC236}">
-                <a16:creationId xmlns:a16="http://schemas.microsoft.com/office/drawing/2014/main" id="{13FA5BE3-98D0-1755-BF56-7FA07DB1D598}"/>
+                <a16:creationId xmlns:a16="http://schemas.microsoft.com/office/drawing/2014/main" id="{812B9057-2D41-BD2E-AC44-2578B2130DE0}"/>
               </a:ext>
             </a:extLst>
           </p:cNvPr>
@@ -5349,7 +5343,7 @@
     </p:spTree>
     <p:extLst>
       <p:ext uri="{BB962C8B-B14F-4D97-AF65-F5344CB8AC3E}">
-        <p14:creationId xmlns:p14="http://schemas.microsoft.com/office/powerpoint/2010/main" val="1503700329"/>
+        <p14:creationId xmlns:p14="http://schemas.microsoft.com/office/powerpoint/2010/main" val="1967771321"/>
       </p:ext>
     </p:extLst>
   </p:cSld>
@@ -5358,10 +5352,10 @@
   </p:clrMapOvr>
   <mc:AlternateContent xmlns:mc="http://schemas.openxmlformats.org/markup-compatibility/2006">
     <mc:Choice xmlns:p14="http://schemas.microsoft.com/office/powerpoint/2010/main" Requires="p14">
-      <p:transition spd="slow" p14:dur="2000" advTm="8000"/>
+      <p:transition spd="slow" p14:dur="2000" advTm="6000"/>
     </mc:Choice>
     <mc:Fallback>
-      <p:transition spd="slow" advTm="8000"/>
+      <p:transition spd="slow" advTm="6000"/>
     </mc:Fallback>
   </mc:AlternateContent>
   <p:timing>
@@ -5392,7 +5386,7 @@
                                   <p:childTnLst>
                                     <p:cmd type="call" cmd="playFrom(0.0)">
                                       <p:cBhvr>
-                                        <p:cTn id="6" dur="7186" fill="hold"/>
+                                        <p:cTn id="6" dur="5687" fill="hold"/>
                                         <p:tgtEl>
                                           <p:spTgt spid="6"/>
                                         </p:tgtEl>
@@ -5473,7 +5467,7 @@
           <p:cNvPr id="2" name="テキスト ボックス 1">
             <a:extLst>
               <a:ext uri="{FF2B5EF4-FFF2-40B4-BE49-F238E27FC236}">
-                <a16:creationId xmlns:a16="http://schemas.microsoft.com/office/drawing/2014/main" id="{AA7EC7FB-D5C6-5533-24CC-61A480105DE2}"/>
+                <a16:creationId xmlns:a16="http://schemas.microsoft.com/office/drawing/2014/main" id="{480633C8-7429-8CF4-27A1-975C493D8AAE}"/>
               </a:ext>
             </a:extLst>
           </p:cNvPr>
@@ -5519,7 +5513,7 @@
           <p:cNvPr id="3" name="テキスト ボックス 2">
             <a:extLst>
               <a:ext uri="{FF2B5EF4-FFF2-40B4-BE49-F238E27FC236}">
-                <a16:creationId xmlns:a16="http://schemas.microsoft.com/office/drawing/2014/main" id="{BB2C72C2-9809-0F08-FFEC-E0725E956137}"/>
+                <a16:creationId xmlns:a16="http://schemas.microsoft.com/office/drawing/2014/main" id="{C1FB499B-E3B8-E7EC-E51F-956FA8F1703E}"/>
               </a:ext>
             </a:extLst>
           </p:cNvPr>
@@ -5559,7 +5553,7 @@
           <p:cNvPr id="4" name="テキスト ボックス 3">
             <a:extLst>
               <a:ext uri="{FF2B5EF4-FFF2-40B4-BE49-F238E27FC236}">
-                <a16:creationId xmlns:a16="http://schemas.microsoft.com/office/drawing/2014/main" id="{E0BFE89E-774D-999E-77DD-93FA8A2A4BEE}"/>
+                <a16:creationId xmlns:a16="http://schemas.microsoft.com/office/drawing/2014/main" id="{46DE78EE-C8E1-8D50-B3D2-5E43055B5727}"/>
               </a:ext>
             </a:extLst>
           </p:cNvPr>
@@ -5624,7 +5618,7 @@
           <p:cNvPr id="5" name="テキスト ボックス 4">
             <a:extLst>
               <a:ext uri="{FF2B5EF4-FFF2-40B4-BE49-F238E27FC236}">
-                <a16:creationId xmlns:a16="http://schemas.microsoft.com/office/drawing/2014/main" id="{3BB75379-5894-7D8B-682A-3A5CBD39C5B2}"/>
+                <a16:creationId xmlns:a16="http://schemas.microsoft.com/office/drawing/2014/main" id="{D0701689-69AC-9A16-BFA2-C95DC55C1D3B}"/>
               </a:ext>
             </a:extLst>
           </p:cNvPr>
@@ -5671,7 +5665,7 @@
             <a:hlinkClick r:id="" action="ppaction://media"/>
             <a:extLst>
               <a:ext uri="{FF2B5EF4-FFF2-40B4-BE49-F238E27FC236}">
-                <a16:creationId xmlns:a16="http://schemas.microsoft.com/office/drawing/2014/main" id="{DEE371D3-AD30-D23D-EF6F-C53C8B2DED59}"/>
+                <a16:creationId xmlns:a16="http://schemas.microsoft.com/office/drawing/2014/main" id="{31418BC6-E0A7-E6BD-E136-5E9BAC0EFF69}"/>
               </a:ext>
             </a:extLst>
           </p:cNvPr>
@@ -5706,7 +5700,7 @@
     </p:spTree>
     <p:extLst>
       <p:ext uri="{BB962C8B-B14F-4D97-AF65-F5344CB8AC3E}">
-        <p14:creationId xmlns:p14="http://schemas.microsoft.com/office/powerpoint/2010/main" val="802092821"/>
+        <p14:creationId xmlns:p14="http://schemas.microsoft.com/office/powerpoint/2010/main" val="4265332390"/>
       </p:ext>
     </p:extLst>
   </p:cSld>
